--- a/PnP_30_09_2026_PowerAutomateApprovalDashboard.pptx
+++ b/PnP_30_09_2026_PowerAutomateApprovalDashboard.pptx
@@ -5,10 +5,10 @@
     <p:sldMasterId id="2147484300" r:id="rId4"/>
   </p:sldMasterIdLst>
   <p:notesMasterIdLst>
-    <p:notesMasterId r:id="rId14"/>
+    <p:notesMasterId r:id="rId13"/>
   </p:notesMasterIdLst>
   <p:handoutMasterIdLst>
-    <p:handoutMasterId r:id="rId15"/>
+    <p:handoutMasterId r:id="rId14"/>
   </p:handoutMasterIdLst>
   <p:sldIdLst>
     <p:sldId id="4227" r:id="rId5"/>
@@ -19,7 +19,6 @@
     <p:sldId id="4254" r:id="rId10"/>
     <p:sldId id="4233" r:id="rId11"/>
     <p:sldId id="4234" r:id="rId12"/>
-    <p:sldId id="4251" r:id="rId13"/>
   </p:sldIdLst>
   <p:sldSz cx="12436475" cy="6994525"/>
   <p:notesSz cx="6881813" cy="9296400"/>
@@ -131,7 +130,6 @@
             <p14:sldId id="4254"/>
             <p14:sldId id="4233"/>
             <p14:sldId id="4234"/>
-            <p14:sldId id="4251"/>
           </p14:sldIdLst>
         </p14:section>
       </p14:sectionLst>
@@ -17474,7 +17472,7 @@
                 </a:solidFill>
                 <a:latin typeface="+mj-lt"/>
               </a:rPr>
-              <a:t>Exploring Approvals API</a:t>
+              <a:t>Exploring Approvals APIs</a:t>
             </a:r>
           </a:p>
           <a:p>
@@ -17496,7 +17494,7 @@
                 </a:solidFill>
                 <a:latin typeface="+mj-lt"/>
               </a:rPr>
-              <a:t>Putting Approvals Within SharePoint</a:t>
+              <a:t>Putting Approvals within SharePoint</a:t>
             </a:r>
           </a:p>
           <a:p>
@@ -39856,45 +39854,12 @@
           </a:fontRef>
         </p:style>
       </p:cxnSp>
-    </p:spTree>
-    <p:extLst>
-      <p:ext uri="{BB962C8B-B14F-4D97-AF65-F5344CB8AC3E}">
-        <p14:creationId xmlns:p14="http://schemas.microsoft.com/office/powerpoint/2010/main" val="1263291043"/>
-      </p:ext>
-    </p:extLst>
-  </p:cSld>
-  <p:clrMapOvr>
-    <a:masterClrMapping/>
-  </p:clrMapOvr>
-  <p:transition>
-    <p:fade/>
-  </p:transition>
-</p:sld>
-</file>
-
-<file path=ppt/slides/slide9.xml><?xml version="1.0" encoding="utf-8"?>
-<p:sld xmlns:a="http://schemas.openxmlformats.org/drawingml/2006/main" xmlns:r="http://schemas.openxmlformats.org/officeDocument/2006/relationships" xmlns:p="http://schemas.openxmlformats.org/presentationml/2006/main">
-  <p:cSld>
-    <p:spTree>
-      <p:nvGrpSpPr>
-        <p:cNvPr id="1" name=""/>
-        <p:cNvGrpSpPr/>
-        <p:nvPr/>
-      </p:nvGrpSpPr>
-      <p:grpSpPr>
-        <a:xfrm>
-          <a:off x="0" y="0"/>
-          <a:ext cx="0" cy="0"/>
-          <a:chOff x="0" y="0"/>
-          <a:chExt cx="0" cy="0"/>
-        </a:xfrm>
-      </p:grpSpPr>
       <p:sp>
         <p:nvSpPr>
-          <p:cNvPr id="3" name="Title 2">
+          <p:cNvPr id="2" name="Title 2">
             <a:extLst>
               <a:ext uri="{FF2B5EF4-FFF2-40B4-BE49-F238E27FC236}">
-                <a16:creationId xmlns:a16="http://schemas.microsoft.com/office/drawing/2014/main" id="{084BF086-6574-787E-B93B-F331BD2666C2}"/>
+                <a16:creationId xmlns:a16="http://schemas.microsoft.com/office/drawing/2014/main" id="{87655ECD-0C84-B14D-16FD-7FA7FB55C398}"/>
               </a:ext>
             </a:extLst>
           </p:cNvPr>
@@ -39905,7 +39870,12 @@
             <p:ph type="title"/>
           </p:nvPr>
         </p:nvSpPr>
-        <p:spPr/>
+        <p:spPr>
+          <a:xfrm>
+            <a:off x="546911" y="2778492"/>
+            <a:ext cx="11889564" cy="917575"/>
+          </a:xfrm>
+        </p:spPr>
         <p:txBody>
           <a:bodyPr/>
           <a:lstStyle/>
@@ -39917,10 +39887,51 @@
           </a:p>
         </p:txBody>
       </p:sp>
+      <p:sp>
+        <p:nvSpPr>
+          <p:cNvPr id="4" name="TextBox 3">
+            <a:extLst>
+              <a:ext uri="{FF2B5EF4-FFF2-40B4-BE49-F238E27FC236}">
+                <a16:creationId xmlns:a16="http://schemas.microsoft.com/office/drawing/2014/main" id="{2376617F-63BB-931B-8A6D-32EDE500CE6D}"/>
+              </a:ext>
+            </a:extLst>
+          </p:cNvPr>
+          <p:cNvSpPr txBox="1"/>
+          <p:nvPr/>
+        </p:nvSpPr>
+        <p:spPr>
+          <a:xfrm>
+            <a:off x="631095" y="3931700"/>
+            <a:ext cx="11330750" cy="646331"/>
+          </a:xfrm>
+          <a:prstGeom prst="rect">
+            <a:avLst/>
+          </a:prstGeom>
+          <a:noFill/>
+        </p:spPr>
+        <p:txBody>
+          <a:bodyPr wrap="square">
+            <a:spAutoFit/>
+          </a:bodyPr>
+          <a:lstStyle/>
+          <a:p>
+            <a:r>
+              <a:rPr lang="en-IN" sz="1800" dirty="0">
+                <a:hlinkClick r:id="rId2"/>
+              </a:rPr>
+              <a:t>https://github.com/siddharth-vaghasia/public-docs/blob/master/react-powerautomate-approvals.sppkg</a:t>
+            </a:r>
+            <a:endParaRPr lang="en-IN" sz="1800" dirty="0"/>
+          </a:p>
+          <a:p>
+            <a:endParaRPr lang="en-IN" sz="1800" dirty="0"/>
+          </a:p>
+        </p:txBody>
+      </p:sp>
     </p:spTree>
     <p:extLst>
       <p:ext uri="{BB962C8B-B14F-4D97-AF65-F5344CB8AC3E}">
-        <p14:creationId xmlns:p14="http://schemas.microsoft.com/office/powerpoint/2010/main" val="3734379476"/>
+        <p14:creationId xmlns:p14="http://schemas.microsoft.com/office/powerpoint/2010/main" val="1263291043"/>
       </p:ext>
     </p:extLst>
   </p:cSld>
